--- a/results/023_research_presentation_deck_design_system_integration/generated/statistical_design_system_fixture/statistical_design_system_fixture.pptx
+++ b/results/023_research_presentation_deck_design_system_integration/generated/statistical_design_system_fixture/statistical_design_system_fixture.pptx
@@ -3467,7 +3467,7 @@
           <a:p>
             <a:pPr algn="ctr"/>
             <a:r>
-              <a:rPr sz="1400" b="1">
+              <a:rPr sz="1500" b="1">
                 <a:solidFill>
                   <a:srgbClr val="171C26"/>
                 </a:solidFill>
@@ -3582,7 +3582,7 @@
           <a:p>
             <a:pPr algn="ctr"/>
             <a:r>
-              <a:rPr sz="1400" b="1">
+              <a:rPr sz="1500" b="1">
                 <a:solidFill>
                   <a:srgbClr val="171C26"/>
                 </a:solidFill>
@@ -3697,7 +3697,7 @@
           <a:p>
             <a:pPr algn="ctr"/>
             <a:r>
-              <a:rPr sz="1400" b="1">
+              <a:rPr sz="1500" b="1">
                 <a:solidFill>
                   <a:srgbClr val="171C26"/>
                 </a:solidFill>
@@ -3812,7 +3812,7 @@
           <a:p>
             <a:pPr algn="ctr"/>
             <a:r>
-              <a:rPr sz="1400" b="1">
+              <a:rPr sz="1500" b="1">
                 <a:solidFill>
                   <a:srgbClr val="171C26"/>
                 </a:solidFill>
